--- a/presentation/Module-2_Discovery-at-Scale.pptx
+++ b/presentation/Module-2_Discovery-at-Scale.pptx
@@ -16,10 +16,9 @@
     <p:sldId id="264" r:id="rId10"/>
     <p:sldId id="265" r:id="rId11"/>
     <p:sldId id="266" r:id="rId12"/>
-    <p:sldId id="267" r:id="rId13"/>
   </p:sldIdLst>
   <p:notesMasterIdLst>
-    <p:notesMasterId r:id="rId14"/>
+    <p:notesMasterId r:id="rId13"/>
   </p:notesMasterIdLst>
   <p:sldSz cx="12192000" cy="6858000"/>
   <p:notesSz cx="6858000" cy="12192000"/>
@@ -713,94 +712,6 @@
             <a:fld id="{F7021451-1387-4CA6-816F-3879F97B5CBC}" type="slidenum">
               <a:rPr lang="en-US"/>
               <a:t>11</a:t>
-            </a:fld>
-            <a:endParaRPr lang="en-US"/>
-          </a:p>
-        </p:txBody>
-      </p:sp>
-    </p:spTree>
-    <p:extLst>
-      <p:ext uri="{BB962C8B-B14F-4D97-AF65-F5344CB8AC3E}">
-        <p14:creationId xmlns:p14="http://schemas.microsoft.com/office/powerpoint/2010/main" val="1024086991"/>
-      </p:ext>
-    </p:extLst>
-  </p:cSld>
-  <p:clrMapOvr>
-    <a:masterClrMapping/>
-  </p:clrMapOvr>
-</p:notes>
-</file>
-
-<file path=ppt/notesSlides/notesSlide12.xml><?xml version="1.0" encoding="utf-8"?>
-<p:notes xmlns:a="http://schemas.openxmlformats.org/drawingml/2006/main" xmlns:r="http://schemas.openxmlformats.org/officeDocument/2006/relationships" xmlns:p="http://schemas.openxmlformats.org/presentationml/2006/main">
-  <p:cSld>
-    <p:spTree>
-      <p:nvGrpSpPr>
-        <p:cNvPr id="1" name=""/>
-        <p:cNvGrpSpPr/>
-        <p:nvPr/>
-      </p:nvGrpSpPr>
-      <p:grpSpPr>
-        <a:xfrm>
-          <a:off x="0" y="0"/>
-          <a:ext cx="0" cy="0"/>
-          <a:chOff x="0" y="0"/>
-          <a:chExt cx="0" cy="0"/>
-        </a:xfrm>
-      </p:grpSpPr>
-      <p:sp>
-        <p:nvSpPr>
-          <p:cNvPr id="2" name="Slide Image Placeholder 1"/>
-          <p:cNvSpPr>
-            <a:spLocks noGrp="1" noRot="1" noChangeAspect="1"/>
-          </p:cNvSpPr>
-          <p:nvPr>
-            <p:ph type="sldImg"/>
-          </p:nvPr>
-        </p:nvSpPr>
-        <p:spPr/>
-      </p:sp>
-      <p:sp>
-        <p:nvSpPr>
-          <p:cNvPr id="3" name="Notes Placeholder 2"/>
-          <p:cNvSpPr>
-            <a:spLocks noGrp="1"/>
-          </p:cNvSpPr>
-          <p:nvPr>
-            <p:ph type="body" idx="1"/>
-          </p:nvPr>
-        </p:nvSpPr>
-        <p:spPr/>
-        <p:txBody>
-          <a:bodyPr/>
-          <a:lstStyle/>
-          <a:p>
-            <a:r>
-              <a:rPr lang="en-US" dirty="0"/>
-              <a:t/>
-            </a:r>
-            <a:endParaRPr lang="en-US" dirty="0"/>
-          </a:p>
-        </p:txBody>
-      </p:sp>
-      <p:sp>
-        <p:nvSpPr>
-          <p:cNvPr id="4" name="Slide Number Placeholder 3"/>
-          <p:cNvSpPr>
-            <a:spLocks noGrp="1"/>
-          </p:cNvSpPr>
-          <p:nvPr>
-            <p:ph type="sldNum" sz="quarter" idx="10"/>
-          </p:nvPr>
-        </p:nvSpPr>
-        <p:spPr/>
-        <p:txBody>
-          <a:bodyPr/>
-          <a:lstStyle/>
-          <a:p>
-            <a:fld id="{F7021451-1387-4CA6-816F-3879F97B5CBC}" type="slidenum">
-              <a:rPr lang="en-US"/>
-              <a:t>12</a:t>
             </a:fld>
             <a:endParaRPr lang="en-US"/>
           </a:p>
@@ -3384,260 +3295,6 @@
 </p:sld>
 </file>
 
-<file path=ppt/slides/slide12.xml><?xml version="1.0" encoding="utf-8"?>
-<p:sld xmlns:a="http://schemas.openxmlformats.org/drawingml/2006/main" xmlns:r="http://schemas.openxmlformats.org/officeDocument/2006/relationships" xmlns:p="http://schemas.openxmlformats.org/presentationml/2006/main">
-  <p:cSld name="Slide 12">
-    <p:bg>
-      <p:bgPr>
-        <a:solidFill>
-          <a:srgbClr val="FFFFFF"/>
-        </a:solidFill>
-      </p:bgPr>
-    </p:bg>
-    <p:spTree>
-      <p:nvGrpSpPr>
-        <p:cNvPr id="1" name=""/>
-        <p:cNvGrpSpPr/>
-        <p:nvPr/>
-      </p:nvGrpSpPr>
-      <p:grpSpPr>
-        <a:xfrm>
-          <a:off x="0" y="0"/>
-          <a:ext cx="0" cy="0"/>
-          <a:chOff x="0" y="0"/>
-          <a:chExt cx="0" cy="0"/>
-        </a:xfrm>
-      </p:grpSpPr>
-      <p:sp>
-        <p:nvSpPr>
-          <p:cNvPr id="2" name="Shape 0"/>
-          <p:cNvSpPr/>
-          <p:nvPr/>
-        </p:nvSpPr>
-        <p:spPr>
-          <a:xfrm>
-            <a:off x="548640" y="1828800"/>
-            <a:ext cx="11094415" cy="2377440"/>
-          </a:xfrm>
-          <a:prstGeom prst="roundRect">
-            <a:avLst>
-              <a:gd name="adj" fmla="val 4615"/>
-            </a:avLst>
-          </a:prstGeom>
-          <a:solidFill>
-            <a:srgbClr val="F2F5F9"/>
-          </a:solidFill>
-          <a:ln w="15875">
-            <a:solidFill>
-              <a:srgbClr val="C0504D"/>
-            </a:solidFill>
-            <a:prstDash val="solid"/>
-          </a:ln>
-        </p:spPr>
-      </p:sp>
-      <p:sp>
-        <p:nvSpPr>
-          <p:cNvPr id="3" name="Text 1"/>
-          <p:cNvSpPr/>
-          <p:nvPr/>
-        </p:nvSpPr>
-        <p:spPr>
-          <a:xfrm>
-            <a:off x="1005840" y="2103120"/>
-            <a:ext cx="10180015" cy="365760"/>
-          </a:xfrm>
-          <a:prstGeom prst="rect">
-            <a:avLst/>
-          </a:prstGeom>
-          <a:noFill/>
-          <a:ln/>
-        </p:spPr>
-        <p:txBody>
-          <a:bodyPr wrap="square" rtlCol="0" anchor="ctr"/>
-          <a:lstStyle/>
-          <a:p>
-            <a:pPr indent="0" marL="0">
-              <a:buNone/>
-            </a:pPr>
-            <a:r>
-              <a:rPr lang="en-US" sz="1300" b="1" spc="150" kern="0" dirty="0">
-                <a:solidFill>
-                  <a:srgbClr val="C0504D"/>
-                </a:solidFill>
-                <a:latin typeface="Calibri" pitchFamily="34" charset="0"/>
-                <a:ea typeface="Calibri" pitchFamily="34" charset="-122"/>
-                <a:cs typeface="Calibri" pitchFamily="34" charset="-120"/>
-              </a:rPr>
-              <a:t>HANDS-ON NEXT</a:t>
-            </a:r>
-            <a:endParaRPr lang="en-US" sz="1300" dirty="0"/>
-          </a:p>
-        </p:txBody>
-      </p:sp>
-      <p:sp>
-        <p:nvSpPr>
-          <p:cNvPr id="4" name="Text 2"/>
-          <p:cNvSpPr/>
-          <p:nvPr/>
-        </p:nvSpPr>
-        <p:spPr>
-          <a:xfrm>
-            <a:off x="1005840" y="2514600"/>
-            <a:ext cx="10180015" cy="1463040"/>
-          </a:xfrm>
-          <a:prstGeom prst="rect">
-            <a:avLst/>
-          </a:prstGeom>
-          <a:noFill/>
-          <a:ln/>
-        </p:spPr>
-        <p:txBody>
-          <a:bodyPr wrap="square" rtlCol="0" anchor="t"/>
-          <a:lstStyle/>
-          <a:p>
-            <a:pPr indent="0" marL="0">
-              <a:buNone/>
-            </a:pPr>
-            <a:r>
-              <a:rPr lang="en-US" sz="1700" dirty="0">
-                <a:solidFill>
-                  <a:srgbClr val="1B2A4A"/>
-                </a:solidFill>
-                <a:latin typeface="Calibri" pitchFamily="34" charset="0"/>
-                <a:ea typeface="Calibri" pitchFamily="34" charset="-122"/>
-                <a:cs typeface="Calibri" pitchFamily="34" charset="-120"/>
-              </a:rPr>
-              <a:t>Connect an MCP server to your project's design documentation and bug/defect tracker. Have the agent reconstruct your project's architecture from documentation plus code, pull in one open defect, and produce a one-page service/dependency map to carry forward.</a:t>
-            </a:r>
-            <a:endParaRPr lang="en-US" sz="1700" dirty="0"/>
-          </a:p>
-        </p:txBody>
-      </p:sp>
-      <p:sp>
-        <p:nvSpPr>
-          <p:cNvPr id="5" name="Text 3"/>
-          <p:cNvSpPr/>
-          <p:nvPr/>
-        </p:nvSpPr>
-        <p:spPr>
-          <a:xfrm>
-            <a:off x="548640" y="4480560"/>
-            <a:ext cx="11094415" cy="457200"/>
-          </a:xfrm>
-          <a:prstGeom prst="rect">
-            <a:avLst/>
-          </a:prstGeom>
-          <a:noFill/>
-          <a:ln/>
-        </p:spPr>
-        <p:txBody>
-          <a:bodyPr wrap="square" rtlCol="0" anchor="ctr"/>
-          <a:lstStyle/>
-          <a:p>
-            <a:pPr algn="ctr" indent="0" marL="0">
-              <a:buNone/>
-            </a:pPr>
-            <a:r>
-              <a:rPr lang="en-US" sz="1300" i="1" dirty="0">
-                <a:solidFill>
-                  <a:srgbClr val="5A6B85"/>
-                </a:solidFill>
-                <a:latin typeface="Calibri" pitchFamily="34" charset="0"/>
-                <a:ea typeface="Calibri" pitchFamily="34" charset="-122"/>
-                <a:cs typeface="Calibri" pitchFamily="34" charset="-120"/>
-              </a:rPr>
-              <a:t>Next: Module 3: Establishing Governance and Writing a Clarified Specification</a:t>
-            </a:r>
-            <a:endParaRPr lang="en-US" sz="1300" dirty="0"/>
-          </a:p>
-        </p:txBody>
-      </p:sp>
-      <p:sp>
-        <p:nvSpPr>
-          <p:cNvPr id="6" name="Text 4"/>
-          <p:cNvSpPr/>
-          <p:nvPr/>
-        </p:nvSpPr>
-        <p:spPr>
-          <a:xfrm>
-            <a:off x="548640" y="6473952"/>
-            <a:ext cx="5486400" cy="274320"/>
-          </a:xfrm>
-          <a:prstGeom prst="rect">
-            <a:avLst/>
-          </a:prstGeom>
-          <a:noFill/>
-          <a:ln/>
-        </p:spPr>
-        <p:txBody>
-          <a:bodyPr wrap="square" rtlCol="0" anchor="ctr"/>
-          <a:lstStyle/>
-          <a:p>
-            <a:pPr algn="l" indent="0" marL="0">
-              <a:buNone/>
-            </a:pPr>
-            <a:r>
-              <a:rPr lang="en-US" sz="1000" dirty="0">
-                <a:solidFill>
-                  <a:srgbClr val="5A6B85"/>
-                </a:solidFill>
-                <a:latin typeface="Calibri" pitchFamily="34" charset="0"/>
-                <a:ea typeface="Calibri" pitchFamily="34" charset="-122"/>
-                <a:cs typeface="Calibri" pitchFamily="34" charset="-120"/>
-              </a:rPr>
-              <a:t>Module 2</a:t>
-            </a:r>
-            <a:endParaRPr lang="en-US" sz="1000" dirty="0"/>
-          </a:p>
-        </p:txBody>
-      </p:sp>
-      <p:sp>
-        <p:nvSpPr>
-          <p:cNvPr id="7" name="Text 5"/>
-          <p:cNvSpPr/>
-          <p:nvPr/>
-        </p:nvSpPr>
-        <p:spPr>
-          <a:xfrm>
-            <a:off x="6156655" y="6473952"/>
-            <a:ext cx="5486400" cy="274320"/>
-          </a:xfrm>
-          <a:prstGeom prst="rect">
-            <a:avLst/>
-          </a:prstGeom>
-          <a:noFill/>
-          <a:ln/>
-        </p:spPr>
-        <p:txBody>
-          <a:bodyPr wrap="square" rtlCol="0" anchor="ctr"/>
-          <a:lstStyle/>
-          <a:p>
-            <a:pPr algn="r" indent="0" marL="0">
-              <a:buNone/>
-            </a:pPr>
-            <a:r>
-              <a:rPr lang="en-US" sz="1000" dirty="0">
-                <a:solidFill>
-                  <a:srgbClr val="5A6B85"/>
-                </a:solidFill>
-                <a:latin typeface="Calibri" pitchFamily="34" charset="0"/>
-                <a:ea typeface="Calibri" pitchFamily="34" charset="-122"/>
-                <a:cs typeface="Calibri" pitchFamily="34" charset="-120"/>
-              </a:rPr>
-              <a:t>Spec-Driven Development with Agentic AI</a:t>
-            </a:r>
-            <a:endParaRPr lang="en-US" sz="1000" dirty="0"/>
-          </a:p>
-        </p:txBody>
-      </p:sp>
-    </p:spTree>
-  </p:cSld>
-  <p:clrMapOvr>
-    <a:masterClrMapping/>
-  </p:clrMapOvr>
-</p:sld>
-</file>
-
 <file path=ppt/slides/slide2.xml><?xml version="1.0" encoding="utf-8"?>
 <p:sld xmlns:a="http://schemas.openxmlformats.org/drawingml/2006/main" xmlns:r="http://schemas.openxmlformats.org/officeDocument/2006/relationships" xmlns:p="http://schemas.openxmlformats.org/presentationml/2006/main">
   <p:cSld name="Slide 2">
@@ -4851,7 +4508,7 @@
                 <a:ea typeface="Calibri" pitchFamily="34" charset="-122"/>
                 <a:cs typeface="Calibri" pitchFamily="34" charset="-120"/>
               </a:rPr>
-              <a:t>This context becomes the input to Module 3's spec, it doesn't replace the spec itself.</a:t>
+              <a:t>This context becomes the input to Module 3's spec. It doesn't replace the spec itself.</a:t>
             </a:r>
             <a:endParaRPr lang="en-US" sz="1500" dirty="0"/>
           </a:p>

--- a/presentation/Module-2_Discovery-at-Scale.pptx
+++ b/presentation/Module-2_Discovery-at-Scale.pptx
@@ -1456,6 +1456,54 @@
           <a:chExt cx="0" cy="0"/>
         </a:xfrm>
       </p:grpSpPr>
+      <p:sp>
+        <p:nvSpPr>
+          <p:cNvPr id="25" name="Slide Number Placeholder 0"/>
+          <p:cNvSpPr>
+            <a:spLocks noGrp="1"/>
+          </p:cNvSpPr>
+          <p:nvPr>
+            <p:ph type="sldNum" sz="quarter" idx="4294967295"/>
+          </p:nvPr>
+        </p:nvSpPr>
+        <p:spPr>
+          <a:xfrm>
+            <a:off x="5821528" y="6473952"/>
+            <a:ext cx="548640" cy="274320"/>
+          </a:xfrm>
+          <a:prstGeom prst="rect">
+            <a:avLst/>
+          </a:prstGeom>
+          <a:extLst>
+            <a:ext uri="{C572A759-6A51-4108-AA02-DFA0A04FC94B}">
+              <ma14:wrappingTextBoxFlag xmlns:ma14="http://schemas.microsoft.com/office/mac/drawingml/2011/main" val="0"/>
+            </a:ext>
+          </a:extLst>
+        </p:spPr>
+        <p:txBody>
+          <a:bodyPr anchor="ctr"/>
+          <a:lstStyle>
+            <a:lvl1pPr>
+              <a:defRPr sz="1000">
+                <a:solidFill>
+                  <a:srgbClr val="8CA3C7"/>
+                </a:solidFill>
+                <a:latin typeface="Calibri"/>
+                <a:ea typeface="Calibri"/>
+                <a:cs typeface="Calibri"/>
+              </a:defRPr>
+            </a:lvl1pPr>
+          </a:lstStyle>
+          <a:p>
+            <a:pPr algn="ctr"/>
+            <a:fld id="{F7021451-1387-4CA6-816F-3879F97B5CBC}" type="slidenum">
+              <a:rPr b="0" lang="en-US"/>
+              <a:t>1000</a:t>
+            </a:fld>
+            <a:endParaRPr lang="en-US"/>
+          </a:p>
+        </p:txBody>
+      </p:sp>
     </p:spTree>
   </p:cSld>
   <p:clrMapOvr>
@@ -1481,6 +1529,54 @@
           <a:chExt cx="0" cy="0"/>
         </a:xfrm>
       </p:grpSpPr>
+      <p:sp>
+        <p:nvSpPr>
+          <p:cNvPr id="25" name="Slide Number Placeholder 0"/>
+          <p:cNvSpPr>
+            <a:spLocks noGrp="1"/>
+          </p:cNvSpPr>
+          <p:nvPr>
+            <p:ph type="sldNum" sz="quarter" idx="4294967295"/>
+          </p:nvPr>
+        </p:nvSpPr>
+        <p:spPr>
+          <a:xfrm>
+            <a:off x="5821528" y="6473952"/>
+            <a:ext cx="548640" cy="274320"/>
+          </a:xfrm>
+          <a:prstGeom prst="rect">
+            <a:avLst/>
+          </a:prstGeom>
+          <a:extLst>
+            <a:ext uri="{C572A759-6A51-4108-AA02-DFA0A04FC94B}">
+              <ma14:wrappingTextBoxFlag xmlns:ma14="http://schemas.microsoft.com/office/mac/drawingml/2011/main" val="0"/>
+            </a:ext>
+          </a:extLst>
+        </p:spPr>
+        <p:txBody>
+          <a:bodyPr anchor="ctr"/>
+          <a:lstStyle>
+            <a:lvl1pPr>
+              <a:defRPr sz="1000">
+                <a:solidFill>
+                  <a:srgbClr val="8CA3C7"/>
+                </a:solidFill>
+                <a:latin typeface="Calibri"/>
+                <a:ea typeface="Calibri"/>
+                <a:cs typeface="Calibri"/>
+              </a:defRPr>
+            </a:lvl1pPr>
+          </a:lstStyle>
+          <a:p>
+            <a:pPr algn="ctr"/>
+            <a:fld id="{F7021451-1387-4CA6-816F-3879F97B5CBC}" type="slidenum">
+              <a:rPr b="0" lang="en-US"/>
+              <a:t>null</a:t>
+            </a:fld>
+            <a:endParaRPr lang="en-US"/>
+          </a:p>
+        </p:txBody>
+      </p:sp>
     </p:spTree>
   </p:cSld>
   <p:clrMap bg1="lt1" tx1="dk1" bg2="lt2" tx2="dk2" accent1="accent1" accent2="accent2" accent3="accent3" accent4="accent4" accent5="accent5" accent6="accent6" hlink="hlink" folHlink="folHlink"/>
@@ -1983,6 +2079,54 @@
               <a:t>Before you write a single spec, you have to understand what's already there.</a:t>
             </a:r>
             <a:endParaRPr lang="en-US" sz="1800" dirty="0"/>
+          </a:p>
+        </p:txBody>
+      </p:sp>
+      <p:sp>
+        <p:nvSpPr>
+          <p:cNvPr id="25" name="Slide Number Placeholder 0"/>
+          <p:cNvSpPr>
+            <a:spLocks noGrp="1"/>
+          </p:cNvSpPr>
+          <p:nvPr>
+            <p:ph type="sldNum" sz="quarter" idx="4294967295"/>
+          </p:nvPr>
+        </p:nvSpPr>
+        <p:spPr>
+          <a:xfrm>
+            <a:off x="5821528" y="6473952"/>
+            <a:ext cx="548640" cy="274320"/>
+          </a:xfrm>
+          <a:prstGeom prst="rect">
+            <a:avLst/>
+          </a:prstGeom>
+          <a:extLst>
+            <a:ext uri="{C572A759-6A51-4108-AA02-DFA0A04FC94B}">
+              <ma14:wrappingTextBoxFlag xmlns:ma14="http://schemas.microsoft.com/office/mac/drawingml/2011/main" val="0"/>
+            </a:ext>
+          </a:extLst>
+        </p:spPr>
+        <p:txBody>
+          <a:bodyPr anchor="ctr"/>
+          <a:lstStyle>
+            <a:lvl1pPr>
+              <a:defRPr sz="1000">
+                <a:solidFill>
+                  <a:srgbClr val="8CA3C7"/>
+                </a:solidFill>
+                <a:latin typeface="Calibri"/>
+                <a:ea typeface="Calibri"/>
+                <a:cs typeface="Calibri"/>
+              </a:defRPr>
+            </a:lvl1pPr>
+          </a:lstStyle>
+          <a:p>
+            <a:pPr algn="ctr"/>
+            <a:fld id="{F7021451-1387-4CA6-816F-3879F97B5CBC}" type="slidenum">
+              <a:rPr b="0" lang="en-US"/>
+              <a:t>1</a:t>
+            </a:fld>
+            <a:endParaRPr lang="en-US"/>
           </a:p>
         </p:txBody>
       </p:sp>
@@ -2961,6 +3105,54 @@
           </a:p>
         </p:txBody>
       </p:sp>
+      <p:sp>
+        <p:nvSpPr>
+          <p:cNvPr id="25" name="Slide Number Placeholder 0"/>
+          <p:cNvSpPr>
+            <a:spLocks noGrp="1"/>
+          </p:cNvSpPr>
+          <p:nvPr>
+            <p:ph type="sldNum" sz="quarter" idx="4294967295"/>
+          </p:nvPr>
+        </p:nvSpPr>
+        <p:spPr>
+          <a:xfrm>
+            <a:off x="5821528" y="6473952"/>
+            <a:ext cx="548640" cy="274320"/>
+          </a:xfrm>
+          <a:prstGeom prst="rect">
+            <a:avLst/>
+          </a:prstGeom>
+          <a:extLst>
+            <a:ext uri="{C572A759-6A51-4108-AA02-DFA0A04FC94B}">
+              <ma14:wrappingTextBoxFlag xmlns:ma14="http://schemas.microsoft.com/office/mac/drawingml/2011/main" val="0"/>
+            </a:ext>
+          </a:extLst>
+        </p:spPr>
+        <p:txBody>
+          <a:bodyPr anchor="ctr"/>
+          <a:lstStyle>
+            <a:lvl1pPr>
+              <a:defRPr sz="1000">
+                <a:solidFill>
+                  <a:srgbClr val="5A6B85"/>
+                </a:solidFill>
+                <a:latin typeface="Calibri"/>
+                <a:ea typeface="Calibri"/>
+                <a:cs typeface="Calibri"/>
+              </a:defRPr>
+            </a:lvl1pPr>
+          </a:lstStyle>
+          <a:p>
+            <a:pPr algn="ctr"/>
+            <a:fld id="{F7021451-1387-4CA6-816F-3879F97B5CBC}" type="slidenum">
+              <a:rPr b="0" lang="en-US"/>
+              <a:t>10</a:t>
+            </a:fld>
+            <a:endParaRPr lang="en-US"/>
+          </a:p>
+        </p:txBody>
+      </p:sp>
     </p:spTree>
   </p:cSld>
   <p:clrMapOvr>
@@ -3287,6 +3479,54 @@
           </a:p>
         </p:txBody>
       </p:sp>
+      <p:sp>
+        <p:nvSpPr>
+          <p:cNvPr id="25" name="Slide Number Placeholder 0"/>
+          <p:cNvSpPr>
+            <a:spLocks noGrp="1"/>
+          </p:cNvSpPr>
+          <p:nvPr>
+            <p:ph type="sldNum" sz="quarter" idx="4294967295"/>
+          </p:nvPr>
+        </p:nvSpPr>
+        <p:spPr>
+          <a:xfrm>
+            <a:off x="5821528" y="6473952"/>
+            <a:ext cx="548640" cy="274320"/>
+          </a:xfrm>
+          <a:prstGeom prst="rect">
+            <a:avLst/>
+          </a:prstGeom>
+          <a:extLst>
+            <a:ext uri="{C572A759-6A51-4108-AA02-DFA0A04FC94B}">
+              <ma14:wrappingTextBoxFlag xmlns:ma14="http://schemas.microsoft.com/office/mac/drawingml/2011/main" val="0"/>
+            </a:ext>
+          </a:extLst>
+        </p:spPr>
+        <p:txBody>
+          <a:bodyPr anchor="ctr"/>
+          <a:lstStyle>
+            <a:lvl1pPr>
+              <a:defRPr sz="1000">
+                <a:solidFill>
+                  <a:srgbClr val="8CA3C7"/>
+                </a:solidFill>
+                <a:latin typeface="Calibri"/>
+                <a:ea typeface="Calibri"/>
+                <a:cs typeface="Calibri"/>
+              </a:defRPr>
+            </a:lvl1pPr>
+          </a:lstStyle>
+          <a:p>
+            <a:pPr algn="ctr"/>
+            <a:fld id="{F7021451-1387-4CA6-816F-3879F97B5CBC}" type="slidenum">
+              <a:rPr b="0" lang="en-US"/>
+              <a:t>11</a:t>
+            </a:fld>
+            <a:endParaRPr lang="en-US"/>
+          </a:p>
+        </p:txBody>
+      </p:sp>
     </p:spTree>
   </p:cSld>
   <p:clrMapOvr>
@@ -3730,6 +3970,54 @@
           </a:p>
         </p:txBody>
       </p:sp>
+      <p:sp>
+        <p:nvSpPr>
+          <p:cNvPr id="25" name="Slide Number Placeholder 0"/>
+          <p:cNvSpPr>
+            <a:spLocks noGrp="1"/>
+          </p:cNvSpPr>
+          <p:nvPr>
+            <p:ph type="sldNum" sz="quarter" idx="4294967295"/>
+          </p:nvPr>
+        </p:nvSpPr>
+        <p:spPr>
+          <a:xfrm>
+            <a:off x="5821528" y="6473952"/>
+            <a:ext cx="548640" cy="274320"/>
+          </a:xfrm>
+          <a:prstGeom prst="rect">
+            <a:avLst/>
+          </a:prstGeom>
+          <a:extLst>
+            <a:ext uri="{C572A759-6A51-4108-AA02-DFA0A04FC94B}">
+              <ma14:wrappingTextBoxFlag xmlns:ma14="http://schemas.microsoft.com/office/mac/drawingml/2011/main" val="0"/>
+            </a:ext>
+          </a:extLst>
+        </p:spPr>
+        <p:txBody>
+          <a:bodyPr anchor="ctr"/>
+          <a:lstStyle>
+            <a:lvl1pPr>
+              <a:defRPr sz="1000">
+                <a:solidFill>
+                  <a:srgbClr val="5A6B85"/>
+                </a:solidFill>
+                <a:latin typeface="Calibri"/>
+                <a:ea typeface="Calibri"/>
+                <a:cs typeface="Calibri"/>
+              </a:defRPr>
+            </a:lvl1pPr>
+          </a:lstStyle>
+          <a:p>
+            <a:pPr algn="ctr"/>
+            <a:fld id="{F7021451-1387-4CA6-816F-3879F97B5CBC}" type="slidenum">
+              <a:rPr b="0" lang="en-US"/>
+              <a:t>2</a:t>
+            </a:fld>
+            <a:endParaRPr lang="en-US"/>
+          </a:p>
+        </p:txBody>
+      </p:sp>
     </p:spTree>
   </p:cSld>
   <p:clrMapOvr>
@@ -4161,6 +4449,54 @@
           </a:p>
         </p:txBody>
       </p:sp>
+      <p:sp>
+        <p:nvSpPr>
+          <p:cNvPr id="25" name="Slide Number Placeholder 0"/>
+          <p:cNvSpPr>
+            <a:spLocks noGrp="1"/>
+          </p:cNvSpPr>
+          <p:nvPr>
+            <p:ph type="sldNum" sz="quarter" idx="4294967295"/>
+          </p:nvPr>
+        </p:nvSpPr>
+        <p:spPr>
+          <a:xfrm>
+            <a:off x="5821528" y="6473952"/>
+            <a:ext cx="548640" cy="274320"/>
+          </a:xfrm>
+          <a:prstGeom prst="rect">
+            <a:avLst/>
+          </a:prstGeom>
+          <a:extLst>
+            <a:ext uri="{C572A759-6A51-4108-AA02-DFA0A04FC94B}">
+              <ma14:wrappingTextBoxFlag xmlns:ma14="http://schemas.microsoft.com/office/mac/drawingml/2011/main" val="0"/>
+            </a:ext>
+          </a:extLst>
+        </p:spPr>
+        <p:txBody>
+          <a:bodyPr anchor="ctr"/>
+          <a:lstStyle>
+            <a:lvl1pPr>
+              <a:defRPr sz="1000">
+                <a:solidFill>
+                  <a:srgbClr val="5A6B85"/>
+                </a:solidFill>
+                <a:latin typeface="Calibri"/>
+                <a:ea typeface="Calibri"/>
+                <a:cs typeface="Calibri"/>
+              </a:defRPr>
+            </a:lvl1pPr>
+          </a:lstStyle>
+          <a:p>
+            <a:pPr algn="ctr"/>
+            <a:fld id="{F7021451-1387-4CA6-816F-3879F97B5CBC}" type="slidenum">
+              <a:rPr b="0" lang="en-US"/>
+              <a:t>3</a:t>
+            </a:fld>
+            <a:endParaRPr lang="en-US"/>
+          </a:p>
+        </p:txBody>
+      </p:sp>
     </p:spTree>
   </p:cSld>
   <p:clrMapOvr>
@@ -4592,6 +4928,54 @@
           </a:p>
         </p:txBody>
       </p:sp>
+      <p:sp>
+        <p:nvSpPr>
+          <p:cNvPr id="25" name="Slide Number Placeholder 0"/>
+          <p:cNvSpPr>
+            <a:spLocks noGrp="1"/>
+          </p:cNvSpPr>
+          <p:nvPr>
+            <p:ph type="sldNum" sz="quarter" idx="4294967295"/>
+          </p:nvPr>
+        </p:nvSpPr>
+        <p:spPr>
+          <a:xfrm>
+            <a:off x="5821528" y="6473952"/>
+            <a:ext cx="548640" cy="274320"/>
+          </a:xfrm>
+          <a:prstGeom prst="rect">
+            <a:avLst/>
+          </a:prstGeom>
+          <a:extLst>
+            <a:ext uri="{C572A759-6A51-4108-AA02-DFA0A04FC94B}">
+              <ma14:wrappingTextBoxFlag xmlns:ma14="http://schemas.microsoft.com/office/mac/drawingml/2011/main" val="0"/>
+            </a:ext>
+          </a:extLst>
+        </p:spPr>
+        <p:txBody>
+          <a:bodyPr anchor="ctr"/>
+          <a:lstStyle>
+            <a:lvl1pPr>
+              <a:defRPr sz="1000">
+                <a:solidFill>
+                  <a:srgbClr val="5A6B85"/>
+                </a:solidFill>
+                <a:latin typeface="Calibri"/>
+                <a:ea typeface="Calibri"/>
+                <a:cs typeface="Calibri"/>
+              </a:defRPr>
+            </a:lvl1pPr>
+          </a:lstStyle>
+          <a:p>
+            <a:pPr algn="ctr"/>
+            <a:fld id="{F7021451-1387-4CA6-816F-3879F97B5CBC}" type="slidenum">
+              <a:rPr b="0" lang="en-US"/>
+              <a:t>4</a:t>
+            </a:fld>
+            <a:endParaRPr lang="en-US"/>
+          </a:p>
+        </p:txBody>
+      </p:sp>
     </p:spTree>
   </p:cSld>
   <p:clrMapOvr>
@@ -4902,6 +5286,54 @@
           </a:p>
         </p:txBody>
       </p:sp>
+      <p:sp>
+        <p:nvSpPr>
+          <p:cNvPr id="25" name="Slide Number Placeholder 0"/>
+          <p:cNvSpPr>
+            <a:spLocks noGrp="1"/>
+          </p:cNvSpPr>
+          <p:nvPr>
+            <p:ph type="sldNum" sz="quarter" idx="4294967295"/>
+          </p:nvPr>
+        </p:nvSpPr>
+        <p:spPr>
+          <a:xfrm>
+            <a:off x="5821528" y="6473952"/>
+            <a:ext cx="548640" cy="274320"/>
+          </a:xfrm>
+          <a:prstGeom prst="rect">
+            <a:avLst/>
+          </a:prstGeom>
+          <a:extLst>
+            <a:ext uri="{C572A759-6A51-4108-AA02-DFA0A04FC94B}">
+              <ma14:wrappingTextBoxFlag xmlns:ma14="http://schemas.microsoft.com/office/mac/drawingml/2011/main" val="0"/>
+            </a:ext>
+          </a:extLst>
+        </p:spPr>
+        <p:txBody>
+          <a:bodyPr anchor="ctr"/>
+          <a:lstStyle>
+            <a:lvl1pPr>
+              <a:defRPr sz="1000">
+                <a:solidFill>
+                  <a:srgbClr val="8CA3C7"/>
+                </a:solidFill>
+                <a:latin typeface="Calibri"/>
+                <a:ea typeface="Calibri"/>
+                <a:cs typeface="Calibri"/>
+              </a:defRPr>
+            </a:lvl1pPr>
+          </a:lstStyle>
+          <a:p>
+            <a:pPr algn="ctr"/>
+            <a:fld id="{F7021451-1387-4CA6-816F-3879F97B5CBC}" type="slidenum">
+              <a:rPr b="0" lang="en-US"/>
+              <a:t>5</a:t>
+            </a:fld>
+            <a:endParaRPr lang="en-US"/>
+          </a:p>
+        </p:txBody>
+      </p:sp>
     </p:spTree>
   </p:cSld>
   <p:clrMapOvr>
@@ -4967,7 +5399,7 @@
                 <a:ea typeface="Calibri" pitchFamily="34" charset="-122"/>
                 <a:cs typeface="Calibri" pitchFamily="34" charset="-120"/>
               </a:rPr>
-              <a:t>APPLYING THIS WITH</a:t>
+              <a:t>APPLYING THE CONCEPTS</a:t>
             </a:r>
             <a:endParaRPr lang="en-US" sz="1400" dirty="0"/>
           </a:p>
@@ -5020,45 +5452,6 @@
         </p:nvSpPr>
         <p:spPr>
           <a:xfrm>
-            <a:off x="548640" y="3977640"/>
-            <a:ext cx="9722815" cy="822960"/>
-          </a:xfrm>
-          <a:prstGeom prst="rect">
-            <a:avLst/>
-          </a:prstGeom>
-          <a:noFill/>
-          <a:ln/>
-        </p:spPr>
-        <p:txBody>
-          <a:bodyPr wrap="square" rtlCol="0" anchor="ctr"/>
-          <a:lstStyle/>
-          <a:p>
-            <a:pPr algn="l" indent="0" marL="0">
-              <a:buNone/>
-            </a:pPr>
-            <a:r>
-              <a:rPr lang="en-US" sz="1600" i="1" dirty="0">
-                <a:solidFill>
-                  <a:srgbClr val="FFFFFF"/>
-                </a:solidFill>
-                <a:latin typeface="Calibri" pitchFamily="34" charset="0"/>
-                <a:ea typeface="Calibri" pitchFamily="34" charset="-122"/>
-                <a:cs typeface="Calibri" pitchFamily="34" charset="-120"/>
-              </a:rPr>
-              <a:t>Where this module's concept does, and doesn't, map to a command.</a:t>
-            </a:r>
-            <a:endParaRPr lang="en-US" sz="1600" dirty="0"/>
-          </a:p>
-        </p:txBody>
-      </p:sp>
-      <p:sp>
-        <p:nvSpPr>
-          <p:cNvPr id="5" name="Text 3"/>
-          <p:cNvSpPr/>
-          <p:nvPr/>
-        </p:nvSpPr>
-        <p:spPr>
-          <a:xfrm>
             <a:off x="548640" y="6473952"/>
             <a:ext cx="5486400" cy="274320"/>
           </a:xfrm>
@@ -5092,7 +5485,7 @@
       </p:sp>
       <p:sp>
         <p:nvSpPr>
-          <p:cNvPr id="6" name="Text 4"/>
+          <p:cNvPr id="5" name="Text 3"/>
           <p:cNvSpPr/>
           <p:nvPr/>
         </p:nvSpPr>
@@ -5126,6 +5519,54 @@
               <a:t>Spec-Driven Development with Agentic AI</a:t>
             </a:r>
             <a:endParaRPr lang="en-US" sz="1000" dirty="0"/>
+          </a:p>
+        </p:txBody>
+      </p:sp>
+      <p:sp>
+        <p:nvSpPr>
+          <p:cNvPr id="25" name="Slide Number Placeholder 0"/>
+          <p:cNvSpPr>
+            <a:spLocks noGrp="1"/>
+          </p:cNvSpPr>
+          <p:nvPr>
+            <p:ph type="sldNum" sz="quarter" idx="4294967295"/>
+          </p:nvPr>
+        </p:nvSpPr>
+        <p:spPr>
+          <a:xfrm>
+            <a:off x="5821528" y="6473952"/>
+            <a:ext cx="548640" cy="274320"/>
+          </a:xfrm>
+          <a:prstGeom prst="rect">
+            <a:avLst/>
+          </a:prstGeom>
+          <a:extLst>
+            <a:ext uri="{C572A759-6A51-4108-AA02-DFA0A04FC94B}">
+              <ma14:wrappingTextBoxFlag xmlns:ma14="http://schemas.microsoft.com/office/mac/drawingml/2011/main" val="0"/>
+            </a:ext>
+          </a:extLst>
+        </p:spPr>
+        <p:txBody>
+          <a:bodyPr anchor="ctr"/>
+          <a:lstStyle>
+            <a:lvl1pPr>
+              <a:defRPr sz="1000">
+                <a:solidFill>
+                  <a:srgbClr val="8CA3C7"/>
+                </a:solidFill>
+                <a:latin typeface="Calibri"/>
+                <a:ea typeface="Calibri"/>
+                <a:cs typeface="Calibri"/>
+              </a:defRPr>
+            </a:lvl1pPr>
+          </a:lstStyle>
+          <a:p>
+            <a:pPr algn="ctr"/>
+            <a:fld id="{F7021451-1387-4CA6-816F-3879F97B5CBC}" type="slidenum">
+              <a:rPr b="0" lang="en-US"/>
+              <a:t>6</a:t>
+            </a:fld>
+            <a:endParaRPr lang="en-US"/>
           </a:p>
         </p:txBody>
       </p:sp>
@@ -5544,6 +5985,54 @@
           </a:p>
         </p:txBody>
       </p:sp>
+      <p:sp>
+        <p:nvSpPr>
+          <p:cNvPr id="25" name="Slide Number Placeholder 0"/>
+          <p:cNvSpPr>
+            <a:spLocks noGrp="1"/>
+          </p:cNvSpPr>
+          <p:nvPr>
+            <p:ph type="sldNum" sz="quarter" idx="4294967295"/>
+          </p:nvPr>
+        </p:nvSpPr>
+        <p:spPr>
+          <a:xfrm>
+            <a:off x="5821528" y="6473952"/>
+            <a:ext cx="548640" cy="274320"/>
+          </a:xfrm>
+          <a:prstGeom prst="rect">
+            <a:avLst/>
+          </a:prstGeom>
+          <a:extLst>
+            <a:ext uri="{C572A759-6A51-4108-AA02-DFA0A04FC94B}">
+              <ma14:wrappingTextBoxFlag xmlns:ma14="http://schemas.microsoft.com/office/mac/drawingml/2011/main" val="0"/>
+            </a:ext>
+          </a:extLst>
+        </p:spPr>
+        <p:txBody>
+          <a:bodyPr anchor="ctr"/>
+          <a:lstStyle>
+            <a:lvl1pPr>
+              <a:defRPr sz="1000">
+                <a:solidFill>
+                  <a:srgbClr val="5A6B85"/>
+                </a:solidFill>
+                <a:latin typeface="Calibri"/>
+                <a:ea typeface="Calibri"/>
+                <a:cs typeface="Calibri"/>
+              </a:defRPr>
+            </a:lvl1pPr>
+          </a:lstStyle>
+          <a:p>
+            <a:pPr algn="ctr"/>
+            <a:fld id="{F7021451-1387-4CA6-816F-3879F97B5CBC}" type="slidenum">
+              <a:rPr b="0" lang="en-US"/>
+              <a:t>7</a:t>
+            </a:fld>
+            <a:endParaRPr lang="en-US"/>
+          </a:p>
+        </p:txBody>
+      </p:sp>
     </p:spTree>
   </p:cSld>
   <p:clrMapOvr>
@@ -5609,7 +6098,7 @@
                 <a:ea typeface="Calibri" pitchFamily="34" charset="-122"/>
                 <a:cs typeface="Calibri" pitchFamily="34" charset="-120"/>
               </a:rPr>
-              <a:t>APPLYING THIS WITH</a:t>
+              <a:t>APPLYING THE CONCEPTS</a:t>
             </a:r>
             <a:endParaRPr lang="en-US" sz="1400" dirty="0"/>
           </a:p>
@@ -5729,6 +6218,54 @@
               <a:t>Spec-Driven Development with Agentic AI</a:t>
             </a:r>
             <a:endParaRPr lang="en-US" sz="1000" dirty="0"/>
+          </a:p>
+        </p:txBody>
+      </p:sp>
+      <p:sp>
+        <p:nvSpPr>
+          <p:cNvPr id="25" name="Slide Number Placeholder 0"/>
+          <p:cNvSpPr>
+            <a:spLocks noGrp="1"/>
+          </p:cNvSpPr>
+          <p:nvPr>
+            <p:ph type="sldNum" sz="quarter" idx="4294967295"/>
+          </p:nvPr>
+        </p:nvSpPr>
+        <p:spPr>
+          <a:xfrm>
+            <a:off x="5821528" y="6473952"/>
+            <a:ext cx="548640" cy="274320"/>
+          </a:xfrm>
+          <a:prstGeom prst="rect">
+            <a:avLst/>
+          </a:prstGeom>
+          <a:extLst>
+            <a:ext uri="{C572A759-6A51-4108-AA02-DFA0A04FC94B}">
+              <ma14:wrappingTextBoxFlag xmlns:ma14="http://schemas.microsoft.com/office/mac/drawingml/2011/main" val="0"/>
+            </a:ext>
+          </a:extLst>
+        </p:spPr>
+        <p:txBody>
+          <a:bodyPr anchor="ctr"/>
+          <a:lstStyle>
+            <a:lvl1pPr>
+              <a:defRPr sz="1000">
+                <a:solidFill>
+                  <a:srgbClr val="8CA3C7"/>
+                </a:solidFill>
+                <a:latin typeface="Calibri"/>
+                <a:ea typeface="Calibri"/>
+                <a:cs typeface="Calibri"/>
+              </a:defRPr>
+            </a:lvl1pPr>
+          </a:lstStyle>
+          <a:p>
+            <a:pPr algn="ctr"/>
+            <a:fld id="{F7021451-1387-4CA6-816F-3879F97B5CBC}" type="slidenum">
+              <a:rPr b="0" lang="en-US"/>
+              <a:t>8</a:t>
+            </a:fld>
+            <a:endParaRPr lang="en-US"/>
           </a:p>
         </p:txBody>
       </p:sp>
@@ -6211,6 +6748,54 @@
               <a:t>Spec-Driven Development with Agentic AI</a:t>
             </a:r>
             <a:endParaRPr lang="en-US" sz="1000" dirty="0"/>
+          </a:p>
+        </p:txBody>
+      </p:sp>
+      <p:sp>
+        <p:nvSpPr>
+          <p:cNvPr id="25" name="Slide Number Placeholder 0"/>
+          <p:cNvSpPr>
+            <a:spLocks noGrp="1"/>
+          </p:cNvSpPr>
+          <p:nvPr>
+            <p:ph type="sldNum" sz="quarter" idx="4294967295"/>
+          </p:nvPr>
+        </p:nvSpPr>
+        <p:spPr>
+          <a:xfrm>
+            <a:off x="5821528" y="6473952"/>
+            <a:ext cx="548640" cy="274320"/>
+          </a:xfrm>
+          <a:prstGeom prst="rect">
+            <a:avLst/>
+          </a:prstGeom>
+          <a:extLst>
+            <a:ext uri="{C572A759-6A51-4108-AA02-DFA0A04FC94B}">
+              <ma14:wrappingTextBoxFlag xmlns:ma14="http://schemas.microsoft.com/office/mac/drawingml/2011/main" val="0"/>
+            </a:ext>
+          </a:extLst>
+        </p:spPr>
+        <p:txBody>
+          <a:bodyPr anchor="ctr"/>
+          <a:lstStyle>
+            <a:lvl1pPr>
+              <a:defRPr sz="1000">
+                <a:solidFill>
+                  <a:srgbClr val="5A6B85"/>
+                </a:solidFill>
+                <a:latin typeface="Calibri"/>
+                <a:ea typeface="Calibri"/>
+                <a:cs typeface="Calibri"/>
+              </a:defRPr>
+            </a:lvl1pPr>
+          </a:lstStyle>
+          <a:p>
+            <a:pPr algn="ctr"/>
+            <a:fld id="{F7021451-1387-4CA6-816F-3879F97B5CBC}" type="slidenum">
+              <a:rPr b="0" lang="en-US"/>
+              <a:t>9</a:t>
+            </a:fld>
+            <a:endParaRPr lang="en-US"/>
           </a:p>
         </p:txBody>
       </p:sp>

--- a/presentation/Module-2_Discovery-at-Scale.pptx
+++ b/presentation/Module-2_Discovery-at-Scale.pptx
@@ -3277,7 +3277,7 @@
                 <a:ea typeface="Calibri" pitchFamily="34" charset="-122"/>
                 <a:cs typeface="Calibri" pitchFamily="34" charset="-120"/>
               </a:rPr>
-              <a:t>Discovery precedes specification, always, on a brownfield codebase.</a:t>
+              <a:t>Discovery precedes specification, always, on a brownfield codebase, because you can't write requirements against a system you don't yet understand.</a:t>
             </a:r>
             <a:endParaRPr lang="en-US" sz="1700" dirty="0"/>
           </a:p>
@@ -3336,7 +3336,7 @@
                 <a:ea typeface="Calibri" pitchFamily="34" charset="-122"/>
                 <a:cs typeface="Calibri" pitchFamily="34" charset="-120"/>
               </a:rPr>
-              <a:t>MCP is the connective tissue between your agent and everything outside the repo.</a:t>
+              <a:t>MCP is the connective tissue between your agent and everything outside the repo: docs, trackers, and prior decisions.</a:t>
             </a:r>
             <a:endParaRPr lang="en-US" sz="1700" dirty="0"/>
           </a:p>
@@ -3395,7 +3395,7 @@
                 <a:ea typeface="Calibri" pitchFamily="34" charset="-122"/>
                 <a:cs typeface="Calibri" pitchFamily="34" charset="-120"/>
               </a:rPr>
-              <a:t>OpenSpec's explore command is a natural fit for this step; Spec Kit expects discovery to happen upstream of it.</a:t>
+              <a:t>OpenSpec's explore command is a natural fit for this step; Spec Kit expects discovery to happen upstream of it, in your agent rather than in the CLI.</a:t>
             </a:r>
             <a:endParaRPr lang="en-US" sz="1700" dirty="0"/>
           </a:p>
@@ -4203,7 +4203,7 @@
                 <a:ea typeface="Calibri" pitchFamily="34" charset="-122"/>
                 <a:cs typeface="Calibri" pitchFamily="34" charset="-120"/>
               </a:rPr>
-              <a:t>A 50-100 microservice hierarchical estate can't be understood by reading files one at a time.</a:t>
+              <a:t>A 50-100 microservice hierarchical estate can't be understood by reading files one at a time: there simply isn't enough time, and the connections between services live outside any single file.</a:t>
             </a:r>
             <a:endParaRPr lang="en-US" sz="1500" dirty="0"/>
           </a:p>
@@ -4284,7 +4284,7 @@
                 <a:ea typeface="Calibri" pitchFamily="34" charset="-122"/>
                 <a:cs typeface="Calibri" pitchFamily="34" charset="-120"/>
               </a:rPr>
-              <a:t>Undocumented decisions, inconsistent conventions across services, and years of incremental change hide the "why" behind the "what."</a:t>
+              <a:t>Undocumented decisions, inconsistent conventions across services, and years of incremental change hide the "why" behind the "what," so the code alone tells you what happens but not what was intended.</a:t>
             </a:r>
             <a:endParaRPr lang="en-US" sz="1500" dirty="0"/>
           </a:p>
@@ -4365,7 +4365,7 @@
                 <a:ea typeface="Calibri" pitchFamily="34" charset="-122"/>
                 <a:cs typeface="Calibri" pitchFamily="34" charset="-120"/>
               </a:rPr>
-              <a:t>Writing a spec against code you don't understand just encodes your misunderstanding into the spec.</a:t>
+              <a:t>Writing a spec against code you don't understand just encodes your misunderstanding into the spec, which then gets built into the plan, the tasks, and eventually the shipped code.</a:t>
             </a:r>
             <a:endParaRPr lang="en-US" sz="1500" dirty="0"/>
           </a:p>
@@ -4682,7 +4682,7 @@
                 <a:ea typeface="Calibri" pitchFamily="34" charset="-122"/>
                 <a:cs typeface="Calibri" pitchFamily="34" charset="-120"/>
               </a:rPr>
-              <a:t>MCP connects your coding agent to systems outside the codebase: wikis, architecture docs, prior specs, and the bug/defect tracker.</a:t>
+              <a:t>MCP connects your coding agent to systems outside the codebase: wikis, architecture docs, prior specs, and the bug/defect tracker, so the agent can pull in context a code search alone would never find.</a:t>
             </a:r>
             <a:endParaRPr lang="en-US" sz="1500" dirty="0"/>
           </a:p>
@@ -4763,7 +4763,7 @@
                 <a:ea typeface="Calibri" pitchFamily="34" charset="-122"/>
                 <a:cs typeface="Calibri" pitchFamily="34" charset="-120"/>
               </a:rPr>
-              <a:t>The agent reconstructs a service's architecture and responsibilities from documentation plus code, and can pull in known open defects.</a:t>
+              <a:t>The agent reconstructs a service's architecture and responsibilities from documentation plus code, and can pull in known open defects, giving you a head start instead of starting from a blank page.</a:t>
             </a:r>
             <a:endParaRPr lang="en-US" sz="1500" dirty="0"/>
           </a:p>
@@ -4844,7 +4844,7 @@
                 <a:ea typeface="Calibri" pitchFamily="34" charset="-122"/>
                 <a:cs typeface="Calibri" pitchFamily="34" charset="-120"/>
               </a:rPr>
-              <a:t>This context becomes the input to Module 3's spec. It doesn't replace the spec itself.</a:t>
+              <a:t>This context becomes the input to Module 3's spec. It doesn't replace the spec itself: discovery tells you what's true today, the spec tells you what should be true after the change.</a:t>
             </a:r>
             <a:endParaRPr lang="en-US" sz="1500" dirty="0"/>
           </a:p>
@@ -5141,7 +5141,7 @@
                 <a:ea typeface="Calibri" pitchFamily="34" charset="-122"/>
                 <a:cs typeface="Calibri" pitchFamily="34" charset="-120"/>
               </a:rPr>
-              <a:t>Produce a lightweight, one-page service/dependency map as a precursor artifact.</a:t>
+              <a:t>Produce a lightweight, one-page service/dependency map as a precursor artifact: just enough to orient a teammate, or an agent, quickly, not a full architecture document.</a:t>
             </a:r>
             <a:endParaRPr lang="en-US" sz="1500" dirty="0"/>
           </a:p>
@@ -5202,7 +5202,7 @@
                 <a:ea typeface="Calibri" pitchFamily="34" charset="-122"/>
                 <a:cs typeface="Calibri" pitchFamily="34" charset="-120"/>
               </a:rPr>
-              <a:t>That map, and any defect pulled in, carries forward through the rest of the course.</a:t>
+              <a:t>That map, and any defect pulled in, carries forward through the rest of the course: it becomes the background you hand the agent when you write the constitution and spec in Module 3, so this isn't a one-off exercise.</a:t>
             </a:r>
             <a:endParaRPr lang="en-US" sz="1500" dirty="0"/>
           </a:p>
@@ -5801,7 +5801,7 @@
                 <a:ea typeface="Calibri" pitchFamily="34" charset="-122"/>
                 <a:cs typeface="Calibri" pitchFamily="34" charset="-120"/>
               </a:rPr>
-              <a:t>Spec Kit's command chain starts at constitution and specify. It has no built-in command for reading unfamiliar code or reconciling it against external documentation before a spec exists.</a:t>
+              <a:t>Spec Kit's command chain starts at constitution and specify. It has no built-in command for reading unfamiliar code or reconciling it against external documentation before a spec exists, because Spec Kit assumes you already understand what you're specifying.</a:t>
             </a:r>
             <a:endParaRPr lang="en-US" sz="1450" dirty="0"/>
           </a:p>
@@ -5901,7 +5901,7 @@
                 <a:ea typeface="Calibri" pitchFamily="34" charset="-122"/>
                 <a:cs typeface="Calibri" pitchFamily="34" charset="-120"/>
               </a:rPr>
-              <a:t>Discovery happens through your coding agent's own MCP connections (Copilot or Claude Code), one layer below the Spec Kit CLI. The resulting context is what you hand to /speckit.specify as background when you write the spec in Module 3.</a:t>
+              <a:t>Discovery happens through your coding agent's own MCP connections (Copilot or Claude Code), one layer below the Spec Kit CLI. The resulting context is what you hand to /speckit.specify as background when you write the spec in Module 3, so nothing here is wasted, it just isn't a named Spec Kit command.</a:t>
             </a:r>
             <a:endParaRPr lang="en-US" sz="1450" dirty="0"/>
           </a:p>
@@ -6517,7 +6517,7 @@
                 <a:ea typeface="Calibri" pitchFamily="34" charset="-122"/>
                 <a:cs typeface="Calibri" pitchFamily="34" charset="-120"/>
               </a:rPr>
-              <a:t>A no-stakes thinking partner: reads your codebase, compares options, and sharpens a fuzzy idea into a concrete plan before any change exists.</a:t>
+              <a:t>A no-stakes thinking partner: reads your codebase, compares options, and sharpens a fuzzy idea into a concrete plan before any change exists, so you can test a direction without committing to it yet.</a:t>
             </a:r>
             <a:endParaRPr lang="en-US" sz="1350" dirty="0"/>
           </a:p>
@@ -6592,7 +6592,7 @@
                 <a:ea typeface="Calibri" pitchFamily="34" charset="-122"/>
                 <a:cs typeface="Calibri" pitchFamily="34" charset="-120"/>
               </a:rPr>
-              <a:t>With MCP connections in place, explore can incorporate design docs and tracker context directly into its investigation.</a:t>
+              <a:t>With MCP connections in place, explore can incorporate design docs and tracker context directly into its investigation, which is what makes it a genuine fit for this module's discovery work.</a:t>
             </a:r>
             <a:endParaRPr lang="en-US" sz="1400" dirty="0"/>
           </a:p>
@@ -6667,7 +6667,7 @@
                 <a:ea typeface="Calibri" pitchFamily="34" charset="-122"/>
                 <a:cs typeface="Calibri" pitchFamily="34" charset="-120"/>
               </a:rPr>
-              <a:t>Explore creates no artifacts by itself: it hands off to /opsx:propose once the picture is clear.</a:t>
+              <a:t>Explore creates no artifacts by itself: it hands off to /opsx:propose once the picture is clear, keeping the exploratory, low-commitment phase clearly separate from the moment you start proposing a real change.</a:t>
             </a:r>
             <a:endParaRPr lang="en-US" sz="1400" dirty="0"/>
           </a:p>
